--- a/docs/songs/our god.pptx
+++ b/docs/songs/our god.pptx
@@ -10,6 +10,7 @@
     <p:sldId id="427" r:id="rId4"/>
     <p:sldId id="425" r:id="rId5"/>
     <p:sldId id="426" r:id="rId6"/>
+    <p:sldId id="428" r:id="rId7"/>
   </p:sldIdLst>
   <p:sldSz cx="9144000" cy="6858000" type="screen4x3"/>
   <p:notesSz cx="6858000" cy="9144000"/>
@@ -309,7 +310,7 @@
             <a:fld id="{26EA1CF3-4A15-4CBF-9A5A-6A56C368BE71}" type="datetimeFigureOut">
               <a:rPr lang="en-GB" smtClean="0"/>
               <a:pPr/>
-              <a:t>16/02/2026</a:t>
+              <a:t>26/10/2026</a:t>
             </a:fld>
             <a:endParaRPr lang="en-GB"/>
           </a:p>
@@ -476,7 +477,7 @@
             <a:fld id="{26EA1CF3-4A15-4CBF-9A5A-6A56C368BE71}" type="datetimeFigureOut">
               <a:rPr lang="en-GB" smtClean="0"/>
               <a:pPr/>
-              <a:t>16/02/2026</a:t>
+              <a:t>26/10/2026</a:t>
             </a:fld>
             <a:endParaRPr lang="en-GB"/>
           </a:p>
@@ -653,7 +654,7 @@
             <a:fld id="{26EA1CF3-4A15-4CBF-9A5A-6A56C368BE71}" type="datetimeFigureOut">
               <a:rPr lang="en-GB" smtClean="0"/>
               <a:pPr/>
-              <a:t>16/02/2026</a:t>
+              <a:t>26/10/2026</a:t>
             </a:fld>
             <a:endParaRPr lang="en-GB"/>
           </a:p>
@@ -820,7 +821,7 @@
             <a:fld id="{26EA1CF3-4A15-4CBF-9A5A-6A56C368BE71}" type="datetimeFigureOut">
               <a:rPr lang="en-GB" smtClean="0"/>
               <a:pPr/>
-              <a:t>16/02/2026</a:t>
+              <a:t>26/10/2026</a:t>
             </a:fld>
             <a:endParaRPr lang="en-GB"/>
           </a:p>
@@ -1063,7 +1064,7 @@
             <a:fld id="{26EA1CF3-4A15-4CBF-9A5A-6A56C368BE71}" type="datetimeFigureOut">
               <a:rPr lang="en-GB" smtClean="0"/>
               <a:pPr/>
-              <a:t>16/02/2026</a:t>
+              <a:t>26/10/2026</a:t>
             </a:fld>
             <a:endParaRPr lang="en-GB"/>
           </a:p>
@@ -1348,7 +1349,7 @@
             <a:fld id="{26EA1CF3-4A15-4CBF-9A5A-6A56C368BE71}" type="datetimeFigureOut">
               <a:rPr lang="en-GB" smtClean="0"/>
               <a:pPr/>
-              <a:t>16/02/2026</a:t>
+              <a:t>26/10/2026</a:t>
             </a:fld>
             <a:endParaRPr lang="en-GB"/>
           </a:p>
@@ -1767,7 +1768,7 @@
             <a:fld id="{26EA1CF3-4A15-4CBF-9A5A-6A56C368BE71}" type="datetimeFigureOut">
               <a:rPr lang="en-GB" smtClean="0"/>
               <a:pPr/>
-              <a:t>16/02/2026</a:t>
+              <a:t>26/10/2026</a:t>
             </a:fld>
             <a:endParaRPr lang="en-GB"/>
           </a:p>
@@ -1882,7 +1883,7 @@
             <a:fld id="{26EA1CF3-4A15-4CBF-9A5A-6A56C368BE71}" type="datetimeFigureOut">
               <a:rPr lang="en-GB" smtClean="0"/>
               <a:pPr/>
-              <a:t>16/02/2026</a:t>
+              <a:t>26/10/2026</a:t>
             </a:fld>
             <a:endParaRPr lang="en-GB"/>
           </a:p>
@@ -1974,7 +1975,7 @@
             <a:fld id="{26EA1CF3-4A15-4CBF-9A5A-6A56C368BE71}" type="datetimeFigureOut">
               <a:rPr lang="en-GB" smtClean="0"/>
               <a:pPr/>
-              <a:t>16/02/2026</a:t>
+              <a:t>26/10/2026</a:t>
             </a:fld>
             <a:endParaRPr lang="en-GB"/>
           </a:p>
@@ -2248,7 +2249,7 @@
             <a:fld id="{26EA1CF3-4A15-4CBF-9A5A-6A56C368BE71}" type="datetimeFigureOut">
               <a:rPr lang="en-GB" smtClean="0"/>
               <a:pPr/>
-              <a:t>16/02/2026</a:t>
+              <a:t>26/10/2026</a:t>
             </a:fld>
             <a:endParaRPr lang="en-GB"/>
           </a:p>
@@ -2498,7 +2499,7 @@
             <a:fld id="{26EA1CF3-4A15-4CBF-9A5A-6A56C368BE71}" type="datetimeFigureOut">
               <a:rPr lang="en-GB" smtClean="0"/>
               <a:pPr/>
-              <a:t>16/02/2026</a:t>
+              <a:t>26/10/2026</a:t>
             </a:fld>
             <a:endParaRPr lang="en-GB"/>
           </a:p>
@@ -2711,7 +2712,7 @@
             <a:fld id="{26EA1CF3-4A15-4CBF-9A5A-6A56C368BE71}" type="datetimeFigureOut">
               <a:rPr lang="en-GB" smtClean="0"/>
               <a:pPr/>
-              <a:t>16/02/2026</a:t>
+              <a:t>26/10/2026</a:t>
             </a:fld>
             <a:endParaRPr lang="en-GB"/>
           </a:p>
@@ -3352,7 +3353,7 @@
                   <a:schemeClr val="bg1"/>
                 </a:solidFill>
               </a:rPr>
-              <a:t>1/4</a:t>
+              <a:t>1/5</a:t>
             </a:r>
           </a:p>
         </p:txBody>
@@ -3506,7 +3507,7 @@
                   <a:schemeClr val="bg1"/>
                 </a:solidFill>
               </a:rPr>
-              <a:t>2/4</a:t>
+              <a:t>2/5</a:t>
             </a:r>
           </a:p>
         </p:txBody>
@@ -3667,7 +3668,7 @@
                   <a:schemeClr val="bg1"/>
                 </a:solidFill>
               </a:rPr>
-              <a:t>3/4</a:t>
+              <a:t>3/5</a:t>
             </a:r>
           </a:p>
         </p:txBody>
@@ -3810,12 +3811,191 @@
                   <a:schemeClr val="bg1"/>
                 </a:solidFill>
               </a:rPr>
-              <a:t>4/4</a:t>
+              <a:t>4/5</a:t>
             </a:r>
           </a:p>
         </p:txBody>
       </p:sp>
     </p:spTree>
+  </p:cSld>
+  <p:clrMapOvr>
+    <a:masterClrMapping/>
+  </p:clrMapOvr>
+</p:sld>
+</file>
+
+<file path=ppt/slides/slide6.xml><?xml version="1.0" encoding="utf-8"?>
+<p:sld xmlns:a="http://schemas.openxmlformats.org/drawingml/2006/main" xmlns:r="http://schemas.openxmlformats.org/officeDocument/2006/relationships" xmlns:p="http://schemas.openxmlformats.org/presentationml/2006/main">
+  <p:cSld>
+    <p:spTree>
+      <p:nvGrpSpPr>
+        <p:cNvPr id="1" name="">
+          <a:extLst>
+            <a:ext uri="{FF2B5EF4-FFF2-40B4-BE49-F238E27FC236}">
+              <a16:creationId xmlns:a16="http://schemas.microsoft.com/office/drawing/2014/main" id="{38367701-FC53-A8E5-4C67-5CA7C0859C69}"/>
+            </a:ext>
+          </a:extLst>
+        </p:cNvPr>
+        <p:cNvGrpSpPr/>
+        <p:nvPr/>
+      </p:nvGrpSpPr>
+      <p:grpSpPr>
+        <a:xfrm>
+          <a:off x="0" y="0"/>
+          <a:ext cx="0" cy="0"/>
+          <a:chOff x="0" y="0"/>
+          <a:chExt cx="0" cy="0"/>
+        </a:xfrm>
+      </p:grpSpPr>
+      <p:sp>
+        <p:nvSpPr>
+          <p:cNvPr id="3" name="Subtitle 2">
+            <a:extLst>
+              <a:ext uri="{FF2B5EF4-FFF2-40B4-BE49-F238E27FC236}">
+                <a16:creationId xmlns:a16="http://schemas.microsoft.com/office/drawing/2014/main" id="{F13B9B97-5D10-3C5D-290B-3330B7997613}"/>
+              </a:ext>
+            </a:extLst>
+          </p:cNvPr>
+          <p:cNvSpPr>
+            <a:spLocks noGrp="1"/>
+          </p:cNvSpPr>
+          <p:nvPr>
+            <p:ph type="subTitle" idx="1"/>
+          </p:nvPr>
+        </p:nvSpPr>
+        <p:spPr>
+          <a:xfrm>
+            <a:off x="203118" y="764704"/>
+            <a:ext cx="8640960" cy="6480720"/>
+          </a:xfrm>
+        </p:spPr>
+        <p:txBody>
+          <a:bodyPr>
+            <a:noAutofit/>
+          </a:bodyPr>
+          <a:lstStyle/>
+          <a:p>
+            <a:r>
+              <a:rPr lang="en-GB" sz="3600" dirty="0">
+                <a:solidFill>
+                  <a:schemeClr val="bg1"/>
+                </a:solidFill>
+              </a:rPr>
+              <a:t>Our God is greater, </a:t>
+            </a:r>
+          </a:p>
+          <a:p>
+            <a:r>
+              <a:rPr lang="en-GB" sz="3600" dirty="0">
+                <a:solidFill>
+                  <a:schemeClr val="bg1"/>
+                </a:solidFill>
+              </a:rPr>
+              <a:t>Our God is stronger</a:t>
+            </a:r>
+            <a:br>
+              <a:rPr lang="en-GB" sz="3600" dirty="0">
+                <a:solidFill>
+                  <a:schemeClr val="bg1"/>
+                </a:solidFill>
+              </a:rPr>
+            </a:br>
+            <a:r>
+              <a:rPr lang="en-GB" sz="3600" dirty="0">
+                <a:solidFill>
+                  <a:schemeClr val="bg1"/>
+                </a:solidFill>
+              </a:rPr>
+              <a:t>God You are higher than any other</a:t>
+            </a:r>
+            <a:br>
+              <a:rPr lang="en-GB" sz="3600" dirty="0">
+                <a:solidFill>
+                  <a:schemeClr val="bg1"/>
+                </a:solidFill>
+              </a:rPr>
+            </a:br>
+            <a:r>
+              <a:rPr lang="en-GB" sz="3600" dirty="0">
+                <a:solidFill>
+                  <a:schemeClr val="bg1"/>
+                </a:solidFill>
+              </a:rPr>
+              <a:t>Our God is Healer, </a:t>
+            </a:r>
+          </a:p>
+          <a:p>
+            <a:r>
+              <a:rPr lang="en-GB" sz="3600" dirty="0">
+                <a:solidFill>
+                  <a:schemeClr val="bg1"/>
+                </a:solidFill>
+              </a:rPr>
+              <a:t>Awesome in power</a:t>
+            </a:r>
+            <a:br>
+              <a:rPr lang="en-GB" sz="3600" dirty="0">
+                <a:solidFill>
+                  <a:schemeClr val="bg1"/>
+                </a:solidFill>
+              </a:rPr>
+            </a:br>
+            <a:r>
+              <a:rPr lang="en-GB" sz="3600" dirty="0">
+                <a:solidFill>
+                  <a:schemeClr val="bg1"/>
+                </a:solidFill>
+              </a:rPr>
+              <a:t>Our God, Our God</a:t>
+            </a:r>
+          </a:p>
+        </p:txBody>
+      </p:sp>
+      <p:sp>
+        <p:nvSpPr>
+          <p:cNvPr id="4" name="TextBox 3">
+            <a:extLst>
+              <a:ext uri="{FF2B5EF4-FFF2-40B4-BE49-F238E27FC236}">
+                <a16:creationId xmlns:a16="http://schemas.microsoft.com/office/drawing/2014/main" id="{DC322400-8496-2FE0-7C90-28219B532705}"/>
+              </a:ext>
+            </a:extLst>
+          </p:cNvPr>
+          <p:cNvSpPr txBox="1"/>
+          <p:nvPr/>
+        </p:nvSpPr>
+        <p:spPr>
+          <a:xfrm>
+            <a:off x="8529729" y="0"/>
+            <a:ext cx="628698" cy="461665"/>
+          </a:xfrm>
+          <a:prstGeom prst="rect">
+            <a:avLst/>
+          </a:prstGeom>
+          <a:noFill/>
+        </p:spPr>
+        <p:txBody>
+          <a:bodyPr wrap="none" rtlCol="0">
+            <a:spAutoFit/>
+          </a:bodyPr>
+          <a:lstStyle/>
+          <a:p>
+            <a:r>
+              <a:rPr lang="en-GB" sz="2400" b="1" dirty="0">
+                <a:solidFill>
+                  <a:schemeClr val="bg1"/>
+                </a:solidFill>
+              </a:rPr>
+              <a:t>5/5</a:t>
+            </a:r>
+          </a:p>
+        </p:txBody>
+      </p:sp>
+    </p:spTree>
+    <p:extLst>
+      <p:ext uri="{BB962C8B-B14F-4D97-AF65-F5344CB8AC3E}">
+        <p14:creationId xmlns:p14="http://schemas.microsoft.com/office/powerpoint/2010/main" val="2256055885"/>
+      </p:ext>
+    </p:extLst>
   </p:cSld>
   <p:clrMapOvr>
     <a:masterClrMapping/>
